--- a/examples/reference/pptx-flagship/kangzhe_flagship.pptx
+++ b/examples/reference/pptx-flagship/kangzhe_flagship.pptx
@@ -436,7 +436,7 @@
 
 <file path=ppt/slideLayouts/slideLayout7.xml><?xml version="1.0" encoding="utf-8"?>
 <p:sldLayout xmlns:a="http://schemas.openxmlformats.org/drawingml/2006/main" xmlns:p="http://schemas.openxmlformats.org/presentationml/2006/main" type="blank" preserve="1">
-  <p:cSld name="kangzhe_flagship — Blank">
+  <p:cSld name="flag — Blank">
     <p:spTree>
       <p:nvGrpSpPr>
         <p:cNvPr id="1" name=""/>
@@ -526,7 +526,7 @@
 
 <file path=ppt/slideMasters/slideMaster1.xml><?xml version="1.0" encoding="utf-8"?>
 <p:sldMaster xmlns:a="http://schemas.openxmlformats.org/drawingml/2006/main" xmlns:p="http://schemas.openxmlformats.org/presentationml/2006/main" xmlns:r="http://schemas.openxmlformats.org/officeDocument/2006/relationships">
-  <p:cSld name="kangzhe_flagship — Master">
+  <p:cSld name="flag — Master">
     <p:bg>
       <p:bgRef idx="1001">
         <a:schemeClr val="bg1"/>
@@ -2344,9 +2344,9 @@
         <p:grpSpPr>
           <a:xfrm>
             <a:off x="952500" y="1428750"/>
-            <a:ext cx="1254862" cy="234696"/>
+            <a:ext cx="834847" cy="234696"/>
             <a:chOff x="952500" y="1428750"/>
-            <a:chExt cx="1254862" cy="234696"/>
+            <a:chExt cx="834847" cy="234696"/>
           </a:xfrm>
         </p:grpSpPr>
         <p:sp>
@@ -2380,7 +2380,7 @@
           <p:spPr>
             <a:xfrm>
               <a:off x="1403604" y="1428750"/>
-              <a:ext cx="803758" cy="234696"/>
+              <a:ext cx="383743" cy="234696"/>
             </a:xfrm>
             <a:prstGeom prst="rect">
               <a:avLst/>
@@ -2406,7 +2406,7 @@
                   <a:ea typeface="+mn-ea"/>
                   <a:cs typeface="+mn-cs"/>
                 </a:rPr>
-                <a:t>汇报章节</a:t>
+                <a:t>目录</a:t>
               </a:r>
             </a:p>
           </p:txBody>
@@ -2421,9 +2421,9 @@
         <p:grpSpPr>
           <a:xfrm>
             <a:off x="933450" y="1778000"/>
-            <a:ext cx="5126736" cy="819150"/>
+            <a:ext cx="2299716" cy="819150"/>
             <a:chOff x="933450" y="1778000"/>
-            <a:chExt cx="5126736" cy="819150"/>
+            <a:chExt cx="2299716" cy="819150"/>
           </a:xfrm>
         </p:grpSpPr>
         <p:sp>
@@ -2435,7 +2435,7 @@
           <p:spPr>
             <a:xfrm>
               <a:off x="933450" y="1778000"/>
-              <a:ext cx="5126736" cy="819150"/>
+              <a:ext cx="2299716" cy="819150"/>
             </a:xfrm>
             <a:prstGeom prst="rect">
               <a:avLst/>
@@ -2461,7 +2461,7 @@
                   <a:ea typeface="+mn-ea"/>
                   <a:cs typeface="+mn-cs"/>
                 </a:rPr>
-                <a:t>三个问题，一个决定</a:t>
+                <a:t>汇报章节</a:t>
               </a:r>
             </a:p>
           </p:txBody>
@@ -4231,9 +4231,9 @@
         <p:grpSpPr>
           <a:xfrm>
             <a:off x="938022" y="1009650"/>
-            <a:ext cx="5783961" cy="557403"/>
+            <a:ext cx="2330958" cy="557403"/>
             <a:chOff x="938022" y="1009650"/>
-            <a:chExt cx="5783961" cy="557403"/>
+            <a:chExt cx="2330958" cy="557403"/>
           </a:xfrm>
         </p:grpSpPr>
         <p:sp>
@@ -4245,7 +4245,7 @@
           <p:spPr>
             <a:xfrm>
               <a:off x="938022" y="1009650"/>
-              <a:ext cx="5783961" cy="557403"/>
+              <a:ext cx="2330958" cy="557403"/>
             </a:xfrm>
             <a:prstGeom prst="rect">
               <a:avLst/>
@@ -4271,40 +4271,7 @@
                   <a:ea typeface="+mn-ea"/>
                   <a:cs typeface="+mn-cs"/>
                 </a:rPr>
-                <a:t>缺口集中在</a:t>
-              </a:r>
-              <a:r>
-                <a:rPr lang="zh-CN" sz="2850" b="1" dirty="0">
-                  <a:solidFill>
-                    <a:srgbClr val="C00000"/>
-                  </a:solidFill>
-                  <a:latin typeface="+mn-lt"/>
-                  <a:ea typeface="+mn-ea"/>
-                  <a:cs typeface="+mn-cs"/>
-                </a:rPr>
-                <a:t>中心记录</a:t>
-              </a:r>
-              <a:r>
-                <a:rPr lang="zh-CN" sz="2850" b="1" dirty="0">
-                  <a:solidFill>
-                    <a:srgbClr val="0F1115"/>
-                  </a:solidFill>
-                  <a:latin typeface="+mn-lt"/>
-                  <a:ea typeface="+mn-ea"/>
-                  <a:cs typeface="+mn-cs"/>
-                </a:rPr>
-                <a:t>与</a:t>
-              </a:r>
-              <a:r>
-                <a:rPr lang="zh-CN" sz="2850" b="1" dirty="0">
-                  <a:solidFill>
-                    <a:srgbClr val="C00000"/>
-                  </a:solidFill>
-                  <a:latin typeface="+mn-lt"/>
-                  <a:ea typeface="+mn-ea"/>
-                  <a:cs typeface="+mn-cs"/>
-                </a:rPr>
-                <a:t>安全性报告</a:t>
+                <a:t>资料缺口分布</a:t>
               </a:r>
             </a:p>
           </p:txBody>
@@ -6200,9 +6167,9 @@
 </file>
 
 <file path=ppt/theme/theme1.xml><?xml version="1.0" encoding="utf-8"?>
-<a:theme xmlns:a="http://schemas.openxmlformats.org/drawingml/2006/main" name="kangzhe_flagship">
+<a:theme xmlns:a="http://schemas.openxmlformats.org/drawingml/2006/main" name="flag">
   <a:themeElements>
-    <a:clrScheme name="kangzhe_flagship">
+    <a:clrScheme name="flag">
       <a:dk1>
         <a:sysClr val="windowText" lastClr="000000"/>
       </a:dk1>
@@ -6240,7 +6207,7 @@
         <a:srgbClr val="800080"/>
       </a:folHlink>
     </a:clrScheme>
-    <a:fontScheme name="kangzhe_flagship">
+    <a:fontScheme name="flag">
       <a:majorFont>
         <a:latin typeface="Arial"/>
         <a:ea typeface="Microsoft YaHei"/>
@@ -6312,7 +6279,7 @@
         <a:font script="Geor" typeface="Sylfaen"/>
       </a:minorFont>
     </a:fontScheme>
-    <a:fmtScheme name="kangzhe_flagship">
+    <a:fmtScheme name="flag">
       <a:fillStyleLst>
         <a:solidFill>
           <a:schemeClr val="phClr"/>
